--- a/Presentation/Stockperdiction_mlOps.pptx
+++ b/Presentation/Stockperdiction_mlOps.pptx
@@ -4161,6 +4161,20 @@
               <a:rPr lang="de-DE" sz="2000" dirty="0" smtClean="0"/>
               <a:t>.</a:t>
             </a:r>
+          </a:p>
+          <a:p>
+            <a:r>
+              <a:rPr lang="de-DE" sz="2000" dirty="0" smtClean="0"/>
+              <a:t>Aktuell werden Modelle pro Aktie trainiert und geloggt, mit der gemeinsamen Betrachtung </a:t>
+            </a:r>
+            <a:r>
+              <a:rPr lang="de-DE" sz="2000" smtClean="0"/>
+              <a:t>der Aktiengruppe </a:t>
+            </a:r>
+            <a:r>
+              <a:rPr lang="de-DE" sz="2000" dirty="0" smtClean="0"/>
+              <a:t>habe ich verwertbare Modelle bekomme mit R²&gt;0.65</a:t>
+            </a:r>
             <a:endParaRPr lang="de-DE" sz="2000" dirty="0"/>
           </a:p>
         </p:txBody>
